--- a/public/materialy/1L/10/Prezentace k hodinám/6. Diligence a závěrečná výzva.pptx
+++ b/public/materialy/1L/10/Prezentace k hodinám/6. Diligence a závěrečná výzva.pptx
@@ -548,7 +548,7 @@
           </a:p>
           <a:p xmlns:a="http://schemas.openxmlformats.org/drawingml/2006/main">
             <a:r>
-              <a:t>Podklady: 06_eticke_a_pravni_situace.csv, 06_zaverecna_vyzva.txt</a:t>
+              <a:t>Podklady: 6. Etické a právní situace.csv, 6. Závěrečná výzva.txt</a:t>
             </a:r>
           </a:p>
           <a:p xmlns:a="http://schemas.openxmlformats.org/drawingml/2006/main">
@@ -574,7 +574,7 @@
           </a:p>
           <a:p xmlns:a="http://schemas.openxmlformats.org/drawingml/2006/main">
             <a:r>
-              <a:t>AI_Fluency__Key_Terminology_Cheat_Sheet.pdf</a:t>
+              <a:t>AI_Fluency_Key_Terminology_Cheat_Sheet.pdf</a:t>
             </a:r>
           </a:p>
           <a:p xmlns:a="http://schemas.openxmlformats.org/drawingml/2006/main">
@@ -709,7 +709,7 @@
           </a:p>
           <a:p xmlns:a="http://schemas.openxmlformats.org/drawingml/2006/main">
             <a:r>
-              <a:t>AI_Fluency__Key_Terminology_Cheat_Sheet.pdf</a:t>
+              <a:t>AI_Fluency_Key_Terminology_Cheat_Sheet.pdf</a:t>
             </a:r>
           </a:p>
           <a:p xmlns:a="http://schemas.openxmlformats.org/drawingml/2006/main">
@@ -839,7 +839,7 @@
           </a:p>
           <a:p xmlns:a="http://schemas.openxmlformats.org/drawingml/2006/main">
             <a:r>
-              <a:t>AI_Fluency__Key_Terminology_Cheat_Sheet.pdf</a:t>
+              <a:t>AI_Fluency_Key_Terminology_Cheat_Sheet.pdf</a:t>
             </a:r>
           </a:p>
           <a:p xmlns:a="http://schemas.openxmlformats.org/drawingml/2006/main">
@@ -934,17 +934,17 @@
           <a:lstStyle xmlns:a="http://schemas.openxmlformats.org/drawingml/2006/main"/>
           <a:p xmlns:a="http://schemas.openxmlformats.org/drawingml/2006/main">
             <a:r>
-              <a:t>Podklady: 06_eticke_a_pravni_situace.csv, 06_zaverecna_vyzva.txt</a:t>
-            </a:r>
-          </a:p>
-          <a:p xmlns:a="http://schemas.openxmlformats.org/drawingml/2006/main">
-            <a:r>
-              <a:t>1. V souboru 06_eticke_a_pravni_situace.csv vyřeš čtyři přidělené situace a jeden rizikový prompt přeformuluj.</a:t>
-            </a:r>
-          </a:p>
-          <a:p xmlns:a="http://schemas.openxmlformats.org/drawingml/2006/main">
-            <a:r>
-              <a:t>2. Ze souboru 06_zaverecna_vyzva.txt vyber variantu a před otevřením Copilotu napiš delegační plán.</a:t>
+              <a:t>Podklady: 6. Etické a právní situace.csv, 6. Závěrečná výzva.txt</a:t>
+            </a:r>
+          </a:p>
+          <a:p xmlns:a="http://schemas.openxmlformats.org/drawingml/2006/main">
+            <a:r>
+              <a:t>1. V souboru 6. Etické a právní situace.csv vyřeš čtyři přidělené situace a jeden rizikový prompt přeformuluj.</a:t>
+            </a:r>
+          </a:p>
+          <a:p xmlns:a="http://schemas.openxmlformats.org/drawingml/2006/main">
+            <a:r>
+              <a:t>2. Ze souboru 6. Závěrečná výzva.txt vyber variantu a před otevřením Copilotu napiš delegační plán.</a:t>
             </a:r>
           </a:p>
           <a:p xmlns:a="http://schemas.openxmlformats.org/drawingml/2006/main">
@@ -984,7 +984,7 @@
           </a:p>
           <a:p xmlns:a="http://schemas.openxmlformats.org/drawingml/2006/main">
             <a:r>
-              <a:t>AI_Fluency__Key_Terminology_Cheat_Sheet.pdf</a:t>
+              <a:t>AI_Fluency_Key_Terminology_Cheat_Sheet.pdf</a:t>
             </a:r>
           </a:p>
           <a:p xmlns:a="http://schemas.openxmlformats.org/drawingml/2006/main">
@@ -1119,7 +1119,7 @@
           </a:p>
           <a:p xmlns:a="http://schemas.openxmlformats.org/drawingml/2006/main">
             <a:r>
-              <a:t>AI_Fluency__Key_Terminology_Cheat_Sheet.pdf</a:t>
+              <a:t>AI_Fluency_Key_Terminology_Cheat_Sheet.pdf</a:t>
             </a:r>
           </a:p>
           <a:p xmlns:a="http://schemas.openxmlformats.org/drawingml/2006/main">
@@ -1244,7 +1244,7 @@
           </a:p>
           <a:p xmlns:a="http://schemas.openxmlformats.org/drawingml/2006/main">
             <a:r>
-              <a:t>AI_Fluency__Key_Terminology_Cheat_Sheet.pdf</a:t>
+              <a:t>AI_Fluency_Key_Terminology_Cheat_Sheet.pdf</a:t>
             </a:r>
           </a:p>
           <a:p xmlns:a="http://schemas.openxmlformats.org/drawingml/2006/main">
@@ -1369,7 +1369,7 @@
           </a:p>
           <a:p xmlns:a="http://schemas.openxmlformats.org/drawingml/2006/main">
             <a:r>
-              <a:t>AI_Fluency__Key_Terminology_Cheat_Sheet.pdf</a:t>
+              <a:t>AI_Fluency_Key_Terminology_Cheat_Sheet.pdf</a:t>
             </a:r>
           </a:p>
           <a:p xmlns:a="http://schemas.openxmlformats.org/drawingml/2006/main">
@@ -4164,7 +4164,7 @@
               </a:defRPr>
             </a:pPr>
             <a:r>
-              <a:t>06_eticke_a_pravni_situace.csv · 06_zaverecna_vyzva.txt</a:t>
+              <a:t>6. Etické a právní situace.csv · 6. Závěrečná výzva.txt</a:t>
             </a:r>
           </a:p>
         </p:txBody>
@@ -4287,7 +4287,7 @@
               </a:defRPr>
             </a:pPr>
             <a:r>
-              <a:t>V souboru 06_eticke_a_pravni_situace.csv vyřeš čtyři přidělené situace a jeden rizikový prompt přeformuluj.</a:t>
+              <a:t>V souboru 6. Etické a právní situace.csv vyřeš čtyři přidělené situace a jeden rizikový prompt přeformuluj.</a:t>
             </a:r>
           </a:p>
         </p:txBody>
@@ -4410,7 +4410,7 @@
               </a:defRPr>
             </a:pPr>
             <a:r>
-              <a:t>Ze souboru 06_zaverecna_vyzva.txt vyber variantu a před otevřením Copilotu napiš delegační plán.</a:t>
+              <a:t>Ze souboru 6. Závěrečná výzva.txt vyber variantu a před otevřením Copilotu napiš delegační plán.</a:t>
             </a:r>
           </a:p>
         </p:txBody>

--- a/public/materialy/1L/10/Prezentace k hodinám/6. Diligence a závěrečná výzva.pptx
+++ b/public/materialy/1L/10/Prezentace k hodinám/6. Diligence a závěrečná výzva.pptx
@@ -558,7 +558,7 @@
           </a:p>
           <a:p xmlns:a="http://schemas.openxmlformats.org/drawingml/2006/main">
             <a:r>
-              <a:t>Před začátkem ověřte, že studenti mají otevřený digitální pracovní sešit a potřebné soubory.</a:t>
+              <a:t>Před začátkem ověř, že studenti mají otevřený digitální pracovní sešit a potřebné soubory.</a:t>
             </a:r>
           </a:p>
           <a:p xmlns:a="http://schemas.openxmlformats.org/drawingml/2006/main"/>
@@ -604,7 +604,7 @@
           </a:p>
           <a:p xmlns:a="http://schemas.openxmlformats.org/drawingml/2006/main">
             <a:r>
-              <a:t>Řekněte nahlas (cca 20 s): Učíme se postup, ne jedno tlačítko. Copilot je ukázka, protože ho škola poskytuje; stejný postup funguje i v jiném AI asistentovi. Podrobnosti pro učitele: příloha Přenesení hodin 4–6 na jiný AI nástroj.</a:t>
+              <a:t>Řekni nahlas (cca 20 s): Učíme se postup, ne jedno tlačítko. Copilot je ukázka, protože ho škola poskytuje; stejný postup funguje i v jiném AI asistentovi. Podrobnosti pro učitele: příloha Přenesení hodin 4–6 na jiný AI nástroj.</a:t>
             </a:r>
           </a:p>
         </p:txBody>
@@ -689,7 +689,7 @@
           </a:p>
           <a:p xmlns:a="http://schemas.openxmlformats.org/drawingml/2006/main">
             <a:r>
-              <a:t>Neprozrazujte odpověď. Cílem je zachytit počáteční model studenta, ke kterému se vrátí při reflexi.</a:t>
+              <a:t>Neprozrazuj odpověď. Cílem je zachytit počáteční model studenta, ke kterému se vrátí při reflexi.</a:t>
             </a:r>
           </a:p>
           <a:p xmlns:a="http://schemas.openxmlformats.org/drawingml/2006/main">
@@ -809,7 +809,7 @@
           </a:p>
           <a:p xmlns:a="http://schemas.openxmlformats.org/drawingml/2006/main">
             <a:r>
-              <a:t>Postup: Připomeňte, že se hodnotí výsledek, proces i reflexe.</a:t>
+              <a:t>Postup: Připomeň, že se hodnotí výsledek, proces i reflexe.</a:t>
             </a:r>
           </a:p>
           <a:p xmlns:a="http://schemas.openxmlformats.org/drawingml/2006/main">
@@ -819,7 +819,7 @@
           </a:p>
           <a:p xmlns:a="http://schemas.openxmlformats.org/drawingml/2006/main">
             <a:r>
-              <a:t>Po každém pojmu vyžádejte jeden příklad a jeden protipříklad. Vysvětlení má používat způsob fungování, ne značku nástroje.</a:t>
+              <a:t>Po každém pojmu vyžádej jeden příklad a jeden protipříklad. Vysvětlení má používat způsob fungování, ne značku nástroje.</a:t>
             </a:r>
           </a:p>
           <a:p xmlns:a="http://schemas.openxmlformats.org/drawingml/2006/main">
@@ -964,7 +964,7 @@
           </a:p>
           <a:p xmlns:a="http://schemas.openxmlformats.org/drawingml/2006/main">
             <a:r>
-              <a:t>Během práce pomáhejte otázkami, nepřebírejte myš ani tvorbu promptu. Vyžadujte průběžné ukládání výstupů a lidských rozhodnutí.</a:t>
+              <a:t>Během práce pomáhej otázkami, nepřebírej myš ani tvorbu promptu. Vyžaduj průběžné ukládání výstupů a lidských rozhodnutí.</a:t>
             </a:r>
           </a:p>
           <a:p xmlns:a="http://schemas.openxmlformats.org/drawingml/2006/main">
@@ -1099,7 +1099,7 @@
           </a:p>
           <a:p xmlns:a="http://schemas.openxmlformats.org/drawingml/2006/main">
             <a:r>
-              <a:t>Proveďte rychlou párovou kontrolu: jeden dobře doložený bod a jedna konkrétní otázka k dopracování.</a:t>
+              <a:t>Proveď rychlou párovou kontrolu: jeden dobře doložený bod a jedna konkrétní otázka k dopracování.</a:t>
             </a:r>
           </a:p>
           <a:p xmlns:a="http://schemas.openxmlformats.org/drawingml/2006/main">
@@ -1219,12 +1219,12 @@
           </a:p>
           <a:p xmlns:a="http://schemas.openxmlformats.org/drawingml/2006/main">
             <a:r>
-              <a:t>Časté omyly: „Dobrý finální text stačí.“ → Hodnocení vyžaduje také doklad procesu, ověření a reflexi. | „Stačí napsat vytvořeno AI.“ → Požadujte konkrétní roli AI, lidské změny, způsob ověření a odpovědnost.</a:t>
-            </a:r>
-          </a:p>
-          <a:p xmlns:a="http://schemas.openxmlformats.org/drawingml/2006/main">
-            <a:r>
-              <a:t>Nečtěte řešení slovo od slova. Porovnejte dva studentské postupy a nechte třídu určit, který má lepší důkazy nebo jasnější lidské rozhodnutí.</a:t>
+              <a:t>Časté omyly: „Dobrý finální text stačí.“ → Hodnocení vyžaduje také doklad procesu, ověření a reflexi. | „Stačí napsat vytvořeno AI.“ → Požaduj konkrétní roli AI, lidské změny, způsob ověření a odpovědnost.</a:t>
+            </a:r>
+          </a:p>
+          <a:p xmlns:a="http://schemas.openxmlformats.org/drawingml/2006/main">
+            <a:r>
+              <a:t>Nečti řešení slovo od slova. Porovnej dva studentské postupy a nech třídu určit, který má lepší důkazy nebo jasnější lidské rozhodnutí.</a:t>
             </a:r>
           </a:p>
           <a:p xmlns:a="http://schemas.openxmlformats.org/drawingml/2006/main">
@@ -1344,12 +1344,12 @@
           </a:p>
           <a:p xmlns:a="http://schemas.openxmlformats.org/drawingml/2006/main">
             <a:r>
-              <a:t>Když technika selže: Použijte připravené modelové výstupy a vytvořte kompletní proces revize bez živé AI.</a:t>
-            </a:r>
-          </a:p>
-          <a:p xmlns:a="http://schemas.openxmlformats.org/drawingml/2006/main">
-            <a:r>
-              <a:t>Odpovědi použijte jako diagnostiku pro začátek další hodiny. U hodiny 3 navazuje diagnostická brána; u hodiny 6 jde o součást závěrečné reflexe.</a:t>
+              <a:t>Když technika selže: Použij připravené modelové výstupy a vytvoř kompletní proces revize bez živé AI.</a:t>
+            </a:r>
+          </a:p>
+          <a:p xmlns:a="http://schemas.openxmlformats.org/drawingml/2006/main">
+            <a:r>
+              <a:t>Odpovědi použij jako diagnostiku pro začátek další hodiny. U hodiny 3 navazuje diagnostická brána; u hodiny 6 jde o součást závěrečné reflexe.</a:t>
             </a:r>
           </a:p>
           <a:p xmlns:a="http://schemas.openxmlformats.org/drawingml/2006/main">
